--- a/03-Slides/ETHAGT05/ETHAGT05-Apresentacao.pptx
+++ b/03-Slides/ETHAGT05/ETHAGT05-Apresentacao.pptx
@@ -13111,6 +13111,42 @@
         </p:nvSpPr>
         <p:spPr>
           <a:xfrm>
+            <a:off x="274320" y="6035040"/>
+            <a:ext cx="11612880" cy="320040"/>
+          </a:xfrm>
+          <a:prstGeom prst="rect">
+            <a:avLst/>
+          </a:prstGeom>
+          <a:noFill/>
+        </p:spPr>
+        <p:txBody>
+          <a:bodyPr wrap="square">
+            <a:spAutoFit/>
+          </a:bodyPr>
+          <a:lstStyle/>
+          <a:p>
+            <a:pPr algn="l">
+              <a:defRPr sz="900" b="0">
+                <a:solidFill>
+                  <a:srgbClr val="2980B9"/>
+                </a:solidFill>
+                <a:latin typeface="Segoe UI"/>
+              </a:defRPr>
+            </a:pPr>
+            <a:r>
+              <a:t>HITL = Human-in-the-Loop — Humano no Ciclo</a:t>
+            </a:r>
+          </a:p>
+        </p:txBody>
+      </p:sp>
+      <p:sp>
+        <p:nvSpPr>
+          <p:cNvPr id="8" name="TextBox 7"/>
+          <p:cNvSpPr txBox="1"/>
+          <p:nvPr/>
+        </p:nvSpPr>
+        <p:spPr>
+          <a:xfrm>
             <a:off x="274320" y="6400800"/>
             <a:ext cx="6400800" cy="365760"/>
           </a:xfrm>
@@ -13138,7 +13174,7 @@
       </p:sp>
       <p:sp>
         <p:nvSpPr>
-          <p:cNvPr id="8" name="TextBox 7"/>
+          <p:cNvPr id="9" name="TextBox 8"/>
           <p:cNvSpPr txBox="1"/>
           <p:nvPr/>
         </p:nvSpPr>
@@ -14626,6 +14662,42 @@
         </p:nvSpPr>
         <p:spPr>
           <a:xfrm>
+            <a:off x="274320" y="6035040"/>
+            <a:ext cx="11612880" cy="320040"/>
+          </a:xfrm>
+          <a:prstGeom prst="rect">
+            <a:avLst/>
+          </a:prstGeom>
+          <a:noFill/>
+        </p:spPr>
+        <p:txBody>
+          <a:bodyPr wrap="square">
+            <a:spAutoFit/>
+          </a:bodyPr>
+          <a:lstStyle/>
+          <a:p>
+            <a:pPr algn="l">
+              <a:defRPr sz="900" b="0">
+                <a:solidFill>
+                  <a:srgbClr val="2980B9"/>
+                </a:solidFill>
+                <a:latin typeface="Segoe UI"/>
+              </a:defRPr>
+            </a:pPr>
+            <a:r>
+              <a:t>ACID = Atomicity Consistency Isolation Durability — propriedades de transacoes  ·  TTL = Time To Live — tempo de validade</a:t>
+            </a:r>
+          </a:p>
+        </p:txBody>
+      </p:sp>
+      <p:sp>
+        <p:nvSpPr>
+          <p:cNvPr id="8" name="TextBox 7"/>
+          <p:cNvSpPr txBox="1"/>
+          <p:nvPr/>
+        </p:nvSpPr>
+        <p:spPr>
+          <a:xfrm>
             <a:off x="274320" y="6400800"/>
             <a:ext cx="6400800" cy="365760"/>
           </a:xfrm>
@@ -14653,7 +14725,7 @@
       </p:sp>
       <p:sp>
         <p:nvSpPr>
-          <p:cNvPr id="8" name="TextBox 7"/>
+          <p:cNvPr id="9" name="TextBox 8"/>
           <p:cNvSpPr txBox="1"/>
           <p:nvPr/>
         </p:nvSpPr>
@@ -19718,6 +19790,42 @@
         </p:nvSpPr>
         <p:spPr>
           <a:xfrm>
+            <a:off x="274320" y="6035040"/>
+            <a:ext cx="11612880" cy="320040"/>
+          </a:xfrm>
+          <a:prstGeom prst="rect">
+            <a:avLst/>
+          </a:prstGeom>
+          <a:noFill/>
+        </p:spPr>
+        <p:txBody>
+          <a:bodyPr wrap="square">
+            <a:spAutoFit/>
+          </a:bodyPr>
+          <a:lstStyle/>
+          <a:p>
+            <a:pPr algn="l">
+              <a:defRPr sz="900" b="0">
+                <a:solidFill>
+                  <a:srgbClr val="2980B9"/>
+                </a:solidFill>
+                <a:latin typeface="Segoe UI"/>
+              </a:defRPr>
+            </a:pPr>
+            <a:r>
+              <a:t>KV = Key-Value — chave-valor</a:t>
+            </a:r>
+          </a:p>
+        </p:txBody>
+      </p:sp>
+      <p:sp>
+        <p:nvSpPr>
+          <p:cNvPr id="8" name="TextBox 7"/>
+          <p:cNvSpPr txBox="1"/>
+          <p:nvPr/>
+        </p:nvSpPr>
+        <p:spPr>
+          <a:xfrm>
             <a:off x="274320" y="6400800"/>
             <a:ext cx="6400800" cy="365760"/>
           </a:xfrm>
@@ -19745,7 +19853,7 @@
       </p:sp>
       <p:sp>
         <p:nvSpPr>
-          <p:cNvPr id="8" name="TextBox 7"/>
+          <p:cNvPr id="9" name="TextBox 8"/>
           <p:cNvSpPr txBox="1"/>
           <p:nvPr/>
         </p:nvSpPr>
@@ -20878,6 +20986,42 @@
         </p:nvSpPr>
         <p:spPr>
           <a:xfrm>
+            <a:off x="274320" y="6035040"/>
+            <a:ext cx="11612880" cy="320040"/>
+          </a:xfrm>
+          <a:prstGeom prst="rect">
+            <a:avLst/>
+          </a:prstGeom>
+          <a:noFill/>
+        </p:spPr>
+        <p:txBody>
+          <a:bodyPr wrap="square">
+            <a:spAutoFit/>
+          </a:bodyPr>
+          <a:lstStyle/>
+          <a:p>
+            <a:pPr algn="l">
+              <a:defRPr sz="900" b="0">
+                <a:solidFill>
+                  <a:srgbClr val="2980B9"/>
+                </a:solidFill>
+                <a:latin typeface="Segoe UI"/>
+              </a:defRPr>
+            </a:pPr>
+            <a:r>
+              <a:t>LRU = Least Recently Used — Menos Recentemente Usado</a:t>
+            </a:r>
+          </a:p>
+        </p:txBody>
+      </p:sp>
+      <p:sp>
+        <p:nvSpPr>
+          <p:cNvPr id="8" name="TextBox 7"/>
+          <p:cNvSpPr txBox="1"/>
+          <p:nvPr/>
+        </p:nvSpPr>
+        <p:spPr>
+          <a:xfrm>
             <a:off x="274320" y="6400800"/>
             <a:ext cx="6400800" cy="365760"/>
           </a:xfrm>
@@ -20905,7 +21049,7 @@
       </p:sp>
       <p:sp>
         <p:nvSpPr>
-          <p:cNvPr id="8" name="TextBox 7"/>
+          <p:cNvPr id="9" name="TextBox 8"/>
           <p:cNvSpPr txBox="1"/>
           <p:nvPr/>
         </p:nvSpPr>
@@ -23090,6 +23234,42 @@
         </p:nvSpPr>
         <p:spPr>
           <a:xfrm>
+            <a:off x="274320" y="6035040"/>
+            <a:ext cx="11612880" cy="320040"/>
+          </a:xfrm>
+          <a:prstGeom prst="rect">
+            <a:avLst/>
+          </a:prstGeom>
+          <a:noFill/>
+        </p:spPr>
+        <p:txBody>
+          <a:bodyPr wrap="square">
+            <a:spAutoFit/>
+          </a:bodyPr>
+          <a:lstStyle/>
+          <a:p>
+            <a:pPr algn="l">
+              <a:defRPr sz="900" b="0">
+                <a:solidFill>
+                  <a:srgbClr val="2980B9"/>
+                </a:solidFill>
+                <a:latin typeface="Segoe UI"/>
+              </a:defRPr>
+            </a:pPr>
+            <a:r>
+              <a:t>PII = Personally Identifiable Information — dados pessoais identificaveis</a:t>
+            </a:r>
+          </a:p>
+        </p:txBody>
+      </p:sp>
+      <p:sp>
+        <p:nvSpPr>
+          <p:cNvPr id="8" name="TextBox 7"/>
+          <p:cNvSpPr txBox="1"/>
+          <p:nvPr/>
+        </p:nvSpPr>
+        <p:spPr>
+          <a:xfrm>
             <a:off x="274320" y="6400800"/>
             <a:ext cx="6400800" cy="365760"/>
           </a:xfrm>
@@ -23120,7 +23300,7 @@
       </p:sp>
       <p:sp>
         <p:nvSpPr>
-          <p:cNvPr id="8" name="TextBox 7"/>
+          <p:cNvPr id="9" name="TextBox 8"/>
           <p:cNvSpPr txBox="1"/>
           <p:nvPr/>
         </p:nvSpPr>
@@ -24808,6 +24988,42 @@
         </p:nvSpPr>
         <p:spPr>
           <a:xfrm>
+            <a:off x="274320" y="6035040"/>
+            <a:ext cx="11612880" cy="320040"/>
+          </a:xfrm>
+          <a:prstGeom prst="rect">
+            <a:avLst/>
+          </a:prstGeom>
+          <a:noFill/>
+        </p:spPr>
+        <p:txBody>
+          <a:bodyPr wrap="square">
+            <a:spAutoFit/>
+          </a:bodyPr>
+          <a:lstStyle/>
+          <a:p>
+            <a:pPr algn="l">
+              <a:defRPr sz="900" b="0">
+                <a:solidFill>
+                  <a:srgbClr val="2980B9"/>
+                </a:solidFill>
+                <a:latin typeface="Segoe UI"/>
+              </a:defRPr>
+            </a:pPr>
+            <a:r>
+              <a:t>ANN = Approximate Nearest Neighbor — busca vetorial aproximada</a:t>
+            </a:r>
+          </a:p>
+        </p:txBody>
+      </p:sp>
+      <p:sp>
+        <p:nvSpPr>
+          <p:cNvPr id="8" name="TextBox 7"/>
+          <p:cNvSpPr txBox="1"/>
+          <p:nvPr/>
+        </p:nvSpPr>
+        <p:spPr>
+          <a:xfrm>
             <a:off x="274320" y="6400800"/>
             <a:ext cx="6400800" cy="365760"/>
           </a:xfrm>
@@ -24835,7 +25051,7 @@
       </p:sp>
       <p:sp>
         <p:nvSpPr>
-          <p:cNvPr id="8" name="TextBox 7"/>
+          <p:cNvPr id="9" name="TextBox 8"/>
           <p:cNvSpPr txBox="1"/>
           <p:nvPr/>
         </p:nvSpPr>
@@ -31073,6 +31289,42 @@
         </p:nvSpPr>
         <p:spPr>
           <a:xfrm>
+            <a:off x="274320" y="6035040"/>
+            <a:ext cx="11612880" cy="320040"/>
+          </a:xfrm>
+          <a:prstGeom prst="rect">
+            <a:avLst/>
+          </a:prstGeom>
+          <a:noFill/>
+        </p:spPr>
+        <p:txBody>
+          <a:bodyPr wrap="square">
+            <a:spAutoFit/>
+          </a:bodyPr>
+          <a:lstStyle/>
+          <a:p>
+            <a:pPr algn="l">
+              <a:defRPr sz="900" b="0">
+                <a:solidFill>
+                  <a:srgbClr val="2980B9"/>
+                </a:solidFill>
+                <a:latin typeface="Segoe UI"/>
+              </a:defRPr>
+            </a:pPr>
+            <a:r>
+              <a:t>GDPR = General Data Protection Regulation — Regulamento de Protecao de Dados (EU)  ·  LGPD = Lei Geral de Protecao de Dados — lei brasileira de dados  ·  NER = Named Entity Recognition — Reconhecimento de Entidades Nomeadas</a:t>
+            </a:r>
+          </a:p>
+        </p:txBody>
+      </p:sp>
+      <p:sp>
+        <p:nvSpPr>
+          <p:cNvPr id="8" name="TextBox 7"/>
+          <p:cNvSpPr txBox="1"/>
+          <p:nvPr/>
+        </p:nvSpPr>
+        <p:spPr>
+          <a:xfrm>
             <a:off x="274320" y="6400800"/>
             <a:ext cx="6400800" cy="365760"/>
           </a:xfrm>
@@ -31100,7 +31352,7 @@
       </p:sp>
       <p:sp>
         <p:nvSpPr>
-          <p:cNvPr id="8" name="TextBox 7"/>
+          <p:cNvPr id="9" name="TextBox 8"/>
           <p:cNvSpPr txBox="1"/>
           <p:nvPr/>
         </p:nvSpPr>
@@ -31916,6 +32168,42 @@
         </p:nvSpPr>
         <p:spPr>
           <a:xfrm>
+            <a:off x="274320" y="6035040"/>
+            <a:ext cx="11612880" cy="320040"/>
+          </a:xfrm>
+          <a:prstGeom prst="rect">
+            <a:avLst/>
+          </a:prstGeom>
+          <a:noFill/>
+        </p:spPr>
+        <p:txBody>
+          <a:bodyPr wrap="square">
+            <a:spAutoFit/>
+          </a:bodyPr>
+          <a:lstStyle/>
+          <a:p>
+            <a:pPr algn="l">
+              <a:defRPr sz="900" b="0">
+                <a:solidFill>
+                  <a:srgbClr val="2980B9"/>
+                </a:solidFill>
+                <a:latin typeface="Segoe UI"/>
+              </a:defRPr>
+            </a:pPr>
+            <a:r>
+              <a:t>RAG = Retrieval-Augmented Generation — Geracao Aumentada por Recuperacao</a:t>
+            </a:r>
+          </a:p>
+        </p:txBody>
+      </p:sp>
+      <p:sp>
+        <p:nvSpPr>
+          <p:cNvPr id="8" name="TextBox 7"/>
+          <p:cNvSpPr txBox="1"/>
+          <p:nvPr/>
+        </p:nvSpPr>
+        <p:spPr>
+          <a:xfrm>
             <a:off x="274320" y="6400800"/>
             <a:ext cx="6400800" cy="365760"/>
           </a:xfrm>
@@ -31943,7 +32231,7 @@
       </p:sp>
       <p:sp>
         <p:nvSpPr>
-          <p:cNvPr id="8" name="TextBox 7"/>
+          <p:cNvPr id="9" name="TextBox 8"/>
           <p:cNvSpPr txBox="1"/>
           <p:nvPr/>
         </p:nvSpPr>
@@ -32339,6 +32627,42 @@
         </p:nvSpPr>
         <p:spPr>
           <a:xfrm>
+            <a:off x="274320" y="6035040"/>
+            <a:ext cx="11612880" cy="320040"/>
+          </a:xfrm>
+          <a:prstGeom prst="rect">
+            <a:avLst/>
+          </a:prstGeom>
+          <a:noFill/>
+        </p:spPr>
+        <p:txBody>
+          <a:bodyPr wrap="square">
+            <a:spAutoFit/>
+          </a:bodyPr>
+          <a:lstStyle/>
+          <a:p>
+            <a:pPr algn="l">
+              <a:defRPr sz="900" b="0">
+                <a:solidFill>
+                  <a:srgbClr val="2980B9"/>
+                </a:solidFill>
+                <a:latin typeface="Segoe UI"/>
+              </a:defRPr>
+            </a:pPr>
+            <a:r>
+              <a:t>AgentOps = Agent Operations — operacao e monitoramento de agentes em producao</a:t>
+            </a:r>
+          </a:p>
+        </p:txBody>
+      </p:sp>
+      <p:sp>
+        <p:nvSpPr>
+          <p:cNvPr id="8" name="TextBox 7"/>
+          <p:cNvSpPr txBox="1"/>
+          <p:nvPr/>
+        </p:nvSpPr>
+        <p:spPr>
+          <a:xfrm>
             <a:off x="274320" y="6400800"/>
             <a:ext cx="6400800" cy="365760"/>
           </a:xfrm>
@@ -32366,7 +32690,7 @@
       </p:sp>
       <p:sp>
         <p:nvSpPr>
-          <p:cNvPr id="8" name="TextBox 7"/>
+          <p:cNvPr id="9" name="TextBox 8"/>
           <p:cNvSpPr txBox="1"/>
           <p:nvPr/>
         </p:nvSpPr>
@@ -35563,6 +35887,42 @@
         </p:nvSpPr>
         <p:spPr>
           <a:xfrm>
+            <a:off x="274320" y="6035040"/>
+            <a:ext cx="11612880" cy="320040"/>
+          </a:xfrm>
+          <a:prstGeom prst="rect">
+            <a:avLst/>
+          </a:prstGeom>
+          <a:noFill/>
+        </p:spPr>
+        <p:txBody>
+          <a:bodyPr wrap="square">
+            <a:spAutoFit/>
+          </a:bodyPr>
+          <a:lstStyle/>
+          <a:p>
+            <a:pPr algn="l">
+              <a:defRPr sz="900" b="0">
+                <a:solidFill>
+                  <a:srgbClr val="2980B9"/>
+                </a:solidFill>
+                <a:latin typeface="Segoe UI"/>
+              </a:defRPr>
+            </a:pPr>
+            <a:r>
+              <a:t>LLM = Large Language Model — Modelo de Linguagem de Grande Escala</a:t>
+            </a:r>
+          </a:p>
+        </p:txBody>
+      </p:sp>
+      <p:sp>
+        <p:nvSpPr>
+          <p:cNvPr id="8" name="TextBox 7"/>
+          <p:cNvSpPr txBox="1"/>
+          <p:nvPr/>
+        </p:nvSpPr>
+        <p:spPr>
+          <a:xfrm>
             <a:off x="274320" y="6400800"/>
             <a:ext cx="6400800" cy="365760"/>
           </a:xfrm>
@@ -35590,7 +35950,7 @@
       </p:sp>
       <p:sp>
         <p:nvSpPr>
-          <p:cNvPr id="8" name="TextBox 7"/>
+          <p:cNvPr id="9" name="TextBox 8"/>
           <p:cNvSpPr txBox="1"/>
           <p:nvPr/>
         </p:nvSpPr>
